--- a/docs/apresentacao.pptx
+++ b/docs/apresentacao.pptx
@@ -513,7 +513,7 @@
           <a:p>
             <a:r>
               <a:rPr lang="en-US" dirty="0"/>
-              <a:t>Abertura. Apresentar o projeto em uma frase e seguir.</a:t>
+              <a:t/>
             </a:r>
             <a:endParaRPr lang="en-US" dirty="0"/>
           </a:p>
@@ -601,7 +601,7 @@
           <a:p>
             <a:r>
               <a:rPr lang="en-US" dirty="0"/>
-              <a:t>Quarenta e cinco segundos. É o achado mais forte para um gestor público.</a:t>
+              <a:t/>
             </a:r>
             <a:endParaRPr lang="en-US" dirty="0"/>
           </a:p>
@@ -689,7 +689,7 @@
           <a:p>
             <a:r>
               <a:rPr lang="en-US" dirty="0"/>
-              <a:t>Quarenta segundos. Fechar com o que o gestor leva para a mesa.</a:t>
+              <a:t/>
             </a:r>
             <a:endParaRPr lang="en-US" dirty="0"/>
           </a:p>
@@ -777,7 +777,7 @@
           <a:p>
             <a:r>
               <a:rPr lang="en-US" dirty="0"/>
-              <a:t>Quinze segundos. Fecho.</a:t>
+              <a:t/>
             </a:r>
             <a:endParaRPr lang="en-US" dirty="0"/>
           </a:p>
@@ -865,7 +865,7 @@
           <a:p>
             <a:r>
               <a:rPr lang="en-US" dirty="0"/>
-              <a:t>Trinta segundos. O problema é conhecido; o que falta é antecipação.</a:t>
+              <a:t/>
             </a:r>
             <a:endParaRPr lang="en-US" dirty="0"/>
           </a:p>
@@ -953,7 +953,7 @@
           <a:p>
             <a:r>
               <a:rPr lang="en-US" dirty="0"/>
-              <a:t>Vinte e cinco segundos. Escopo e escala, sem detalhe técnico ainda.</a:t>
+              <a:t/>
             </a:r>
             <a:endParaRPr lang="en-US" dirty="0"/>
           </a:p>
@@ -1041,7 +1041,7 @@
           <a:p>
             <a:r>
               <a:rPr lang="en-US" dirty="0"/>
-              <a:t>Quarenta segundos. É o ponto técnico mais forte: sem essa exclusão o projeto inteiro seria falso.</a:t>
+              <a:t/>
             </a:r>
             <a:endParaRPr lang="en-US" dirty="0"/>
           </a:p>
@@ -1129,7 +1129,7 @@
           <a:p>
             <a:r>
               <a:rPr lang="en-US" dirty="0"/>
-              <a:t>Trinta e cinco segundos. Achado que não estava no enunciado e mudou o recorte.</a:t>
+              <a:t/>
             </a:r>
             <a:endParaRPr lang="en-US" dirty="0"/>
           </a:p>
@@ -1217,7 +1217,7 @@
           <a:p>
             <a:r>
               <a:rPr lang="en-US" dirty="0"/>
-              <a:t>Quarenta segundos. Aqui está a inteligência aplicada que o desafio pede.</a:t>
+              <a:t/>
             </a:r>
             <a:endParaRPr lang="en-US" dirty="0"/>
           </a:p>
@@ -1305,7 +1305,7 @@
           <a:p>
             <a:r>
               <a:rPr lang="en-US" dirty="0"/>
-              <a:t>Trinta e cinco segundos. Honestidade sobre o limite, e por que ele é do dado e não do modelo.</a:t>
+              <a:t/>
             </a:r>
             <a:endParaRPr lang="en-US" dirty="0"/>
           </a:p>
@@ -1393,7 +1393,7 @@
           <a:p>
             <a:r>
               <a:rPr lang="en-US" dirty="0"/>
-              <a:t>Quarenta segundos. É o slide que transforma uma limitação em produto.</a:t>
+              <a:t/>
             </a:r>
             <a:endParaRPr lang="en-US" dirty="0"/>
           </a:p>
@@ -1481,7 +1481,7 @@
           <a:p>
             <a:r>
               <a:rPr lang="en-US" dirty="0"/>
-              <a:t>Trinta segundos. Responde a pergunta de negócio sobre fatores, com a ressalva de causalidade.</a:t>
+              <a:t/>
             </a:r>
             <a:endParaRPr lang="en-US" dirty="0"/>
           </a:p>
@@ -2218,17 +2218,17 @@
           <a:ln/>
         </p:spPr>
         <p:txBody>
-          <a:bodyPr wrap="square" lIns="0" tIns="0" rIns="0" bIns="0" rtlCol="0" anchor="ctr"/>
+          <a:bodyPr wrap="square" lIns="0" tIns="0" rIns="0" bIns="0" rtlCol="0" anchor="t"/>
           <a:lstStyle/>
           <a:p>
             <a:pPr indent="0" marL="0">
               <a:lnSpc>
-                <a:spcPct val="125000"/>
+                <a:spcPct val="130000"/>
               </a:lnSpc>
               <a:buNone/>
             </a:pPr>
             <a:r>
-              <a:rPr lang="en-US" sz="1500" dirty="0">
+              <a:rPr lang="en-US" sz="1600" dirty="0">
                 <a:solidFill>
                   <a:srgbClr val="1A2B28"/>
                 </a:solidFill>
@@ -2236,28 +2236,28 @@
                 <a:ea typeface="Calibri" pitchFamily="34" charset="-122"/>
                 <a:cs typeface="Calibri" pitchFamily="34" charset="-120"/>
               </a:rPr>
-              <a:t>O agrupamento separou os municípios em quatro perfis. Dois deles têm exatamente o mesmo PIB per capita, de 16,6 mil reais, e taxas de alfabetização de 47,3% e 74,0%.</a:t>
-            </a:r>
-            <a:endParaRPr lang="en-US" sz="1500" dirty="0"/>
+              <a:t>Quatro perfis de município. Dois têm o mesmo PIB per capita, R$ 16,6 mil, e taxas de 47,3% e 74,0%.</a:t>
+            </a:r>
+            <a:endParaRPr lang="en-US" sz="1600" dirty="0"/>
           </a:p>
           <a:p>
             <a:pPr indent="0" marL="0">
               <a:lnSpc>
-                <a:spcPct val="125000"/>
+                <a:spcPct val="130000"/>
               </a:lnSpc>
               <a:buNone/>
             </a:pPr>
-            <a:endParaRPr lang="en-US" sz="1500" dirty="0"/>
+            <a:endParaRPr lang="en-US" sz="1600" dirty="0"/>
           </a:p>
           <a:p>
             <a:pPr indent="0" marL="0">
               <a:lnSpc>
-                <a:spcPct val="125000"/>
+                <a:spcPct val="130000"/>
               </a:lnSpc>
               <a:buNone/>
             </a:pPr>
             <a:r>
-              <a:rPr lang="en-US" sz="1500" dirty="0">
+              <a:rPr lang="en-US" sz="1600" dirty="0">
                 <a:solidFill>
                   <a:srgbClr val="1A2B28"/>
                 </a:solidFill>
@@ -2265,38 +2265,9 @@
                 <a:ea typeface="Calibri" pitchFamily="34" charset="-122"/>
                 <a:cs typeface="Calibri" pitchFamily="34" charset="-120"/>
               </a:rPr>
-              <a:t>São 1.351 municípios de baixa renda alfabetizando acima da média nacional. A renda não determina o resultado.</a:t>
-            </a:r>
-            <a:endParaRPr lang="en-US" sz="1500" dirty="0"/>
-          </a:p>
-          <a:p>
-            <a:pPr indent="0" marL="0">
-              <a:lnSpc>
-                <a:spcPct val="125000"/>
-              </a:lnSpc>
-              <a:buNone/>
-            </a:pPr>
-            <a:endParaRPr lang="en-US" sz="1500" dirty="0"/>
-          </a:p>
-          <a:p>
-            <a:pPr indent="0" marL="0">
-              <a:lnSpc>
-                <a:spcPct val="125000"/>
-              </a:lnSpc>
-              <a:buNone/>
-            </a:pPr>
-            <a:r>
-              <a:rPr lang="en-US" sz="1500" dirty="0">
-                <a:solidFill>
-                  <a:srgbClr val="1A2B28"/>
-                </a:solidFill>
-                <a:latin typeface="Calibri" pitchFamily="34" charset="0"/>
-                <a:ea typeface="Calibri" pitchFamily="34" charset="-122"/>
-                <a:cs typeface="Calibri" pitchFamily="34" charset="-120"/>
-              </a:rPr>
-              <a:t>Isso desloca a pergunta: em vez de tratar pobreza como explicação, vale investigar o que esses municípios fazem que os outros não fazem.</a:t>
-            </a:r>
-            <a:endParaRPr lang="en-US" sz="1500" dirty="0"/>
+              <a:t>São 1.351 municípios de baixa renda acima da média nacional. A renda não determina o resultado.</a:t>
+            </a:r>
+            <a:endParaRPr lang="en-US" sz="1600" dirty="0"/>
           </a:p>
         </p:txBody>
       </p:sp>
@@ -2785,17 +2756,17 @@
           <a:ln/>
         </p:spPr>
         <p:txBody>
-          <a:bodyPr wrap="square" lIns="0" tIns="0" rIns="0" bIns="0" rtlCol="0" anchor="ctr"/>
+          <a:bodyPr wrap="square" lIns="0" tIns="0" rIns="0" bIns="0" rtlCol="0" anchor="t"/>
           <a:lstStyle/>
           <a:p>
             <a:pPr indent="0" marL="0">
               <a:lnSpc>
-                <a:spcPct val="125000"/>
+                <a:spcPct val="130000"/>
               </a:lnSpc>
               <a:buNone/>
             </a:pPr>
             <a:r>
-              <a:rPr lang="en-US" sz="1500" dirty="0">
+              <a:rPr lang="en-US" sz="1600" dirty="0">
                 <a:solidFill>
                   <a:srgbClr val="1A2B28"/>
                 </a:solidFill>
@@ -2803,28 +2774,28 @@
                 <a:ea typeface="Calibri" pitchFamily="34" charset="-122"/>
                 <a:cs typeface="Calibri" pitchFamily="34" charset="-120"/>
               </a:rPr>
-              <a:t>O modelo entrega uma lista de prioridade por território, publicada como tabela consumível no BigQuery.</a:t>
-            </a:r>
-            <a:endParaRPr lang="en-US" sz="1500" dirty="0"/>
+              <a:t>Uma lista de prioridade por território, publicada como tabela consultável.</a:t>
+            </a:r>
+            <a:endParaRPr lang="en-US" sz="1600" dirty="0"/>
           </a:p>
           <a:p>
             <a:pPr indent="0" marL="0">
               <a:lnSpc>
-                <a:spcPct val="125000"/>
+                <a:spcPct val="130000"/>
               </a:lnSpc>
               <a:buNone/>
             </a:pPr>
-            <a:endParaRPr lang="en-US" sz="1500" dirty="0"/>
+            <a:endParaRPr lang="en-US" sz="1600" dirty="0"/>
           </a:p>
           <a:p>
             <a:pPr indent="0" marL="0">
               <a:lnSpc>
-                <a:spcPct val="125000"/>
+                <a:spcPct val="130000"/>
               </a:lnSpc>
               <a:buNone/>
             </a:pPr>
             <a:r>
-              <a:rPr lang="en-US" sz="1500" dirty="0">
+              <a:rPr lang="en-US" sz="1600" dirty="0">
                 <a:solidFill>
                   <a:srgbClr val="1A2B28"/>
                 </a:solidFill>
@@ -2832,28 +2803,28 @@
                 <a:ea typeface="Calibri" pitchFamily="34" charset="-122"/>
                 <a:cs typeface="Calibri" pitchFamily="34" charset="-120"/>
               </a:rPr>
-              <a:t>O quinto mais crítico reúne 1.028 municípios, dos quais 690 no Nordeste e 211 no Norte. Ajustando o limiar de decisão, a triagem passa a encontrar 74% das crianças em risco, contra 34% no limiar padrão.</a:t>
-            </a:r>
-            <a:endParaRPr lang="en-US" sz="1500" dirty="0"/>
+              <a:t>1.028 municípios no quinto mais crítico, 690 no Nordeste. Com o limiar ajustado, a triagem encontra 74% das crianças em risco.</a:t>
+            </a:r>
+            <a:endParaRPr lang="en-US" sz="1600" dirty="0"/>
           </a:p>
           <a:p>
             <a:pPr indent="0" marL="0">
               <a:lnSpc>
-                <a:spcPct val="125000"/>
+                <a:spcPct val="130000"/>
               </a:lnSpc>
               <a:buNone/>
             </a:pPr>
-            <a:endParaRPr lang="en-US" sz="1500" dirty="0"/>
+            <a:endParaRPr lang="en-US" sz="1600" dirty="0"/>
           </a:p>
           <a:p>
             <a:pPr indent="0" marL="0">
               <a:lnSpc>
-                <a:spcPct val="125000"/>
+                <a:spcPct val="130000"/>
               </a:lnSpc>
               <a:buNone/>
             </a:pPr>
             <a:r>
-              <a:rPr lang="en-US" sz="1500" dirty="0">
+              <a:rPr lang="en-US" sz="1600" dirty="0">
                 <a:solidFill>
                   <a:srgbClr val="1A2B28"/>
                 </a:solidFill>
@@ -2861,9 +2832,9 @@
                 <a:ea typeface="Calibri" pitchFamily="34" charset="-122"/>
                 <a:cs typeface="Calibri" pitchFamily="34" charset="-120"/>
               </a:rPr>
-              <a:t>No agregado nacional o país avança 2,68 pontos por ano, contra os 2,76 necessários para a meta de 2030.</a:t>
-            </a:r>
-            <a:endParaRPr lang="en-US" sz="1500" dirty="0"/>
+              <a:t>O país avança 2,68 pontos por ano; a meta pede 2,76.</a:t>
+            </a:r>
+            <a:endParaRPr lang="en-US" sz="1600" dirty="0"/>
           </a:p>
         </p:txBody>
       </p:sp>
@@ -3534,17 +3505,17 @@
           <a:ln/>
         </p:spPr>
         <p:txBody>
-          <a:bodyPr wrap="square" lIns="0" tIns="0" rIns="0" bIns="0" rtlCol="0" anchor="ctr"/>
+          <a:bodyPr wrap="square" lIns="0" tIns="0" rIns="0" bIns="0" rtlCol="0" anchor="t"/>
           <a:lstStyle/>
           <a:p>
             <a:pPr indent="0" marL="0">
               <a:lnSpc>
-                <a:spcPct val="125000"/>
+                <a:spcPct val="130000"/>
               </a:lnSpc>
               <a:buNone/>
             </a:pPr>
             <a:r>
-              <a:rPr lang="en-US" sz="1500" dirty="0">
+              <a:rPr lang="en-US" sz="1600" dirty="0">
                 <a:solidFill>
                   <a:srgbClr val="1A2B28"/>
                 </a:solidFill>
@@ -3552,28 +3523,28 @@
                 <a:ea typeface="Calibri" pitchFamily="34" charset="-122"/>
                 <a:cs typeface="Calibri" pitchFamily="34" charset="-120"/>
               </a:rPr>
-              <a:t>O Compromisso Nacional Criança Alfabetizada estabelece que toda criança esteja alfabetizada ao final do 2º ano do ensino fundamental.</a:t>
-            </a:r>
-            <a:endParaRPr lang="en-US" sz="1500" dirty="0"/>
+              <a:t>Toda criança alfabetizada até o fim do 2º ano. A régua é o Saeb, 743 pontos; a meta, 80% até 2030.</a:t>
+            </a:r>
+            <a:endParaRPr lang="en-US" sz="1600" dirty="0"/>
           </a:p>
           <a:p>
             <a:pPr indent="0" marL="0">
               <a:lnSpc>
-                <a:spcPct val="125000"/>
+                <a:spcPct val="130000"/>
               </a:lnSpc>
               <a:buNone/>
             </a:pPr>
-            <a:endParaRPr lang="en-US" sz="1500" dirty="0"/>
+            <a:endParaRPr lang="en-US" sz="1600" dirty="0"/>
           </a:p>
           <a:p>
             <a:pPr indent="0" marL="0">
               <a:lnSpc>
-                <a:spcPct val="125000"/>
+                <a:spcPct val="130000"/>
               </a:lnSpc>
               <a:buNone/>
             </a:pPr>
             <a:r>
-              <a:rPr lang="en-US" sz="1500" dirty="0">
+              <a:rPr lang="en-US" sz="1600" dirty="0">
                 <a:solidFill>
                   <a:srgbClr val="1A2B28"/>
                 </a:solidFill>
@@ -3581,38 +3552,9 @@
                 <a:ea typeface="Calibri" pitchFamily="34" charset="-122"/>
                 <a:cs typeface="Calibri" pitchFamily="34" charset="-120"/>
               </a:rPr>
-              <a:t>A Pesquisa Alfabetiza Brasil fixou o corte de 743 pontos na escala Saeb, e a meta é chegar a 80% até 2030.</a:t>
-            </a:r>
-            <a:endParaRPr lang="en-US" sz="1500" dirty="0"/>
-          </a:p>
-          <a:p>
-            <a:pPr indent="0" marL="0">
-              <a:lnSpc>
-                <a:spcPct val="125000"/>
-              </a:lnSpc>
-              <a:buNone/>
-            </a:pPr>
-            <a:endParaRPr lang="en-US" sz="1500" dirty="0"/>
-          </a:p>
-          <a:p>
-            <a:pPr indent="0" marL="0">
-              <a:lnSpc>
-                <a:spcPct val="125000"/>
-              </a:lnSpc>
-              <a:buNone/>
-            </a:pPr>
-            <a:r>
-              <a:rPr lang="en-US" sz="1500" dirty="0">
-                <a:solidFill>
-                  <a:srgbClr val="1A2B28"/>
-                </a:solidFill>
-                <a:latin typeface="Calibri" pitchFamily="34" charset="0"/>
-                <a:ea typeface="Calibri" pitchFamily="34" charset="-122"/>
-                <a:cs typeface="Calibri" pitchFamily="34" charset="-120"/>
-              </a:rPr>
-              <a:t>Saber onde o indicador está hoje não basta. O gestor precisa antecipar onde a alfabetização tende a falhar, antes que o resultado apareça.</a:t>
-            </a:r>
-            <a:endParaRPr lang="en-US" sz="1500" dirty="0"/>
+              <a:t>Hoje o resultado só aparece depois da prova aplicada. Este trabalho pergunta: dá para saber antes?</a:t>
+            </a:r>
+            <a:endParaRPr lang="en-US" sz="1600" dirty="0"/>
           </a:p>
         </p:txBody>
       </p:sp>
@@ -3953,17 +3895,17 @@
           <a:ln/>
         </p:spPr>
         <p:txBody>
-          <a:bodyPr wrap="square" lIns="0" tIns="0" rIns="0" bIns="0" rtlCol="0" anchor="ctr"/>
+          <a:bodyPr wrap="square" lIns="0" tIns="0" rIns="0" bIns="0" rtlCol="0" anchor="t"/>
           <a:lstStyle/>
           <a:p>
             <a:pPr indent="0" marL="0">
               <a:lnSpc>
-                <a:spcPct val="125000"/>
+                <a:spcPct val="130000"/>
               </a:lnSpc>
               <a:buNone/>
             </a:pPr>
             <a:r>
-              <a:rPr lang="en-US" sz="1500" dirty="0">
+              <a:rPr lang="en-US" sz="1600" dirty="0">
                 <a:solidFill>
                   <a:srgbClr val="1A2B28"/>
                 </a:solidFill>
@@ -3971,28 +3913,28 @@
                 <a:ea typeface="Calibri" pitchFamily="34" charset="-122"/>
                 <a:cs typeface="Calibri" pitchFamily="34" charset="-120"/>
               </a:rPr>
-              <a:t>Um modelo supervisionado que estima a probabilidade de uma criança ser alfabetizada, a partir de variáveis educacionais, territoriais e socioeconômicas.</a:t>
-            </a:r>
-            <a:endParaRPr lang="en-US" sz="1500" dirty="0"/>
+              <a:t>Um modelo que estima a probabilidade de uma criança ser alfabetizada, a partir de variáveis educacionais, territoriais e socioeconômicas.</a:t>
+            </a:r>
+            <a:endParaRPr lang="en-US" sz="1600" dirty="0"/>
           </a:p>
           <a:p>
             <a:pPr indent="0" marL="0">
               <a:lnSpc>
-                <a:spcPct val="125000"/>
+                <a:spcPct val="130000"/>
               </a:lnSpc>
               <a:buNone/>
             </a:pPr>
-            <a:endParaRPr lang="en-US" sz="1500" dirty="0"/>
+            <a:endParaRPr lang="en-US" sz="1600" dirty="0"/>
           </a:p>
           <a:p>
             <a:pPr indent="0" marL="0">
               <a:lnSpc>
-                <a:spcPct val="125000"/>
+                <a:spcPct val="130000"/>
               </a:lnSpc>
               <a:buNone/>
             </a:pPr>
             <a:r>
-              <a:rPr lang="en-US" sz="1500" dirty="0">
+              <a:rPr lang="en-US" sz="1600" dirty="0">
                 <a:solidFill>
                   <a:srgbClr val="1A2B28"/>
                 </a:solidFill>
@@ -4000,38 +3942,9 @@
                 <a:ea typeface="Calibri" pitchFamily="34" charset="-122"/>
                 <a:cs typeface="Calibri" pitchFamily="34" charset="-120"/>
               </a:rPr>
-              <a:t>A base parte da camada Gold da Fase 2 e é ampliada com os microdados do Alfabetiza Brasil e com indicadores públicos de IDEB, PIB e população.</a:t>
-            </a:r>
-            <a:endParaRPr lang="en-US" sz="1500" dirty="0"/>
-          </a:p>
-          <a:p>
-            <a:pPr indent="0" marL="0">
-              <a:lnSpc>
-                <a:spcPct val="125000"/>
-              </a:lnSpc>
-              <a:buNone/>
-            </a:pPr>
-            <a:endParaRPr lang="en-US" sz="1500" dirty="0"/>
-          </a:p>
-          <a:p>
-            <a:pPr indent="0" marL="0">
-              <a:lnSpc>
-                <a:spcPct val="125000"/>
-              </a:lnSpc>
-              <a:buNone/>
-            </a:pPr>
-            <a:r>
-              <a:rPr lang="en-US" sz="1500" dirty="0">
-                <a:solidFill>
-                  <a:srgbClr val="1A2B28"/>
-                </a:solidFill>
-                <a:latin typeface="Calibri" pitchFamily="34" charset="0"/>
-                <a:ea typeface="Calibri" pitchFamily="34" charset="-122"/>
-                <a:cs typeface="Calibri" pitchFamily="34" charset="-120"/>
-              </a:rPr>
-              <a:t>A pipeline roda de ponta a ponta com um comando, e para sozinha se a qualidade ou o desempenho ficarem abaixo do declarado.</a:t>
-            </a:r>
-            <a:endParaRPr lang="en-US" sz="1500" dirty="0"/>
+              <a:t>A base da Fase 2 foi ampliada com IDEB, PIB e população. Um comando roda tudo.</a:t>
+            </a:r>
+            <a:endParaRPr lang="en-US" sz="1600" dirty="0"/>
           </a:p>
         </p:txBody>
       </p:sp>
@@ -4588,17 +4501,17 @@
           <a:ln/>
         </p:spPr>
         <p:txBody>
-          <a:bodyPr wrap="square" lIns="0" tIns="0" rIns="0" bIns="0" rtlCol="0" anchor="ctr"/>
+          <a:bodyPr wrap="square" lIns="0" tIns="0" rIns="0" bIns="0" rtlCol="0" anchor="t"/>
           <a:lstStyle/>
           <a:p>
             <a:pPr indent="0" marL="0">
               <a:lnSpc>
-                <a:spcPct val="125000"/>
+                <a:spcPct val="130000"/>
               </a:lnSpc>
               <a:buNone/>
             </a:pPr>
             <a:r>
-              <a:rPr lang="en-US" sz="1500" dirty="0">
+              <a:rPr lang="en-US" sz="1600" dirty="0">
                 <a:solidFill>
                   <a:srgbClr val="1A2B28"/>
                 </a:solidFill>
@@ -4606,28 +4519,28 @@
                 <a:ea typeface="Calibri" pitchFamily="34" charset="-122"/>
                 <a:cs typeface="Calibri" pitchFamily="34" charset="-120"/>
               </a:rPr>
-              <a:t>O alvo é definido pelo corte de 743 pontos de proficiência. Usar a proficiência como preditora daria acerto perfeito e um modelo inútil: no momento em que a predição teria valor, antes da avaliação, esse número ainda não existe.</a:t>
-            </a:r>
-            <a:endParaRPr lang="en-US" sz="1500" dirty="0"/>
+              <a:t>A proficiência define o alvo: acima de 743, alfabetizada. Usá-la como preditora daria acerto perfeito e um modelo inútil, porque antes da prova ela não existe.</a:t>
+            </a:r>
+            <a:endParaRPr lang="en-US" sz="1600" dirty="0"/>
           </a:p>
           <a:p>
             <a:pPr indent="0" marL="0">
               <a:lnSpc>
-                <a:spcPct val="125000"/>
+                <a:spcPct val="130000"/>
               </a:lnSpc>
               <a:buNone/>
             </a:pPr>
-            <a:endParaRPr lang="en-US" sz="1500" dirty="0"/>
+            <a:endParaRPr lang="en-US" sz="1600" dirty="0"/>
           </a:p>
           <a:p>
             <a:pPr indent="0" marL="0">
               <a:lnSpc>
-                <a:spcPct val="125000"/>
+                <a:spcPct val="130000"/>
               </a:lnSpc>
               <a:buNone/>
             </a:pPr>
             <a:r>
-              <a:rPr lang="en-US" sz="1500" dirty="0">
+              <a:rPr lang="en-US" sz="1600" dirty="0">
                 <a:solidFill>
                   <a:srgbClr val="1A2B28"/>
                 </a:solidFill>
@@ -4635,38 +4548,9 @@
                 <a:ea typeface="Calibri" pitchFamily="34" charset="-122"/>
                 <a:cs typeface="Calibri" pitchFamily="34" charset="-120"/>
               </a:rPr>
-              <a:t>O cruzamento revelou mais: todo aluno ausente entra na base como não alfabetizado, o que torna presença e preenchimento de caderno igualmente determinantes.</a:t>
-            </a:r>
-            <a:endParaRPr lang="en-US" sz="1500" dirty="0"/>
-          </a:p>
-          <a:p>
-            <a:pPr indent="0" marL="0">
-              <a:lnSpc>
-                <a:spcPct val="125000"/>
-              </a:lnSpc>
-              <a:buNone/>
-            </a:pPr>
-            <a:endParaRPr lang="en-US" sz="1500" dirty="0"/>
-          </a:p>
-          <a:p>
-            <a:pPr indent="0" marL="0">
-              <a:lnSpc>
-                <a:spcPct val="125000"/>
-              </a:lnSpc>
-              <a:buNone/>
-            </a:pPr>
-            <a:r>
-              <a:rPr lang="en-US" sz="1500" dirty="0">
-                <a:solidFill>
-                  <a:srgbClr val="1A2B28"/>
-                </a:solidFill>
-                <a:latin typeface="Calibri" pitchFamily="34" charset="0"/>
-                <a:ea typeface="Calibri" pitchFamily="34" charset="-122"/>
-                <a:cs typeface="Calibri" pitchFamily="34" charset="-120"/>
-              </a:rPr>
-              <a:t>Quatro colunas ficam fora do treino, por regra declarada em configuração.</a:t>
-            </a:r>
-            <a:endParaRPr lang="en-US" sz="1500" dirty="0"/>
+              <a:t>Todo aluno ausente entra como não alfabetizado. Presença também entregava a resposta.</a:t>
+            </a:r>
+            <a:endParaRPr lang="en-US" sz="1600" dirty="0"/>
           </a:p>
         </p:txBody>
       </p:sp>
@@ -5007,17 +4891,17 @@
           <a:ln/>
         </p:spPr>
         <p:txBody>
-          <a:bodyPr wrap="square" lIns="0" tIns="0" rIns="0" bIns="0" rtlCol="0" anchor="ctr"/>
+          <a:bodyPr wrap="square" lIns="0" tIns="0" rIns="0" bIns="0" rtlCol="0" anchor="t"/>
           <a:lstStyle/>
           <a:p>
             <a:pPr indent="0" marL="0">
               <a:lnSpc>
-                <a:spcPct val="125000"/>
+                <a:spcPct val="130000"/>
               </a:lnSpc>
               <a:buNone/>
             </a:pPr>
             <a:r>
-              <a:rPr lang="en-US" sz="1500" dirty="0">
+              <a:rPr lang="en-US" sz="1600" dirty="0">
                 <a:solidFill>
                   <a:srgbClr val="1A2B28"/>
                 </a:solidFill>
@@ -5025,28 +4909,28 @@
                 <a:ea typeface="Calibri" pitchFamily="34" charset="-122"/>
                 <a:cs typeface="Calibri" pitchFamily="34" charset="-120"/>
               </a:rPr>
-              <a:t>Dos 1,88 milhão de alunos classificados como não alfabetizados, 513 mil não têm nenhuma medição de aprendizagem. Foram contados como não alfabetizados por ausência.</a:t>
-            </a:r>
-            <a:endParaRPr lang="en-US" sz="1500" dirty="0"/>
+              <a:t>Dos 1,88 milhão de alunos não alfabetizados, 513 mil nunca fizeram a prova.</a:t>
+            </a:r>
+            <a:endParaRPr lang="en-US" sz="1600" dirty="0"/>
           </a:p>
           <a:p>
             <a:pPr indent="0" marL="0">
               <a:lnSpc>
-                <a:spcPct val="125000"/>
+                <a:spcPct val="130000"/>
               </a:lnSpc>
               <a:buNone/>
             </a:pPr>
-            <a:endParaRPr lang="en-US" sz="1500" dirty="0"/>
+            <a:endParaRPr lang="en-US" sz="1600" dirty="0"/>
           </a:p>
           <a:p>
             <a:pPr indent="0" marL="0">
               <a:lnSpc>
-                <a:spcPct val="125000"/>
+                <a:spcPct val="130000"/>
               </a:lnSpc>
               <a:buNone/>
             </a:pPr>
             <a:r>
-              <a:rPr lang="en-US" sz="1500" dirty="0">
+              <a:rPr lang="en-US" sz="1600" dirty="0">
                 <a:solidFill>
                   <a:srgbClr val="1A2B28"/>
                 </a:solidFill>
@@ -5054,38 +4938,9 @@
                 <a:ea typeface="Calibri" pitchFamily="34" charset="-122"/>
                 <a:cs typeface="Calibri" pitchFamily="34" charset="-120"/>
               </a:rPr>
-              <a:t>Isso muda a pergunta. Incluindo os ausentes, o modelo prevê quem será contabilizado; restringindo aos testados, prevê quem de fato não atingirá o corte.</a:t>
-            </a:r>
-            <a:endParaRPr lang="en-US" sz="1500" dirty="0"/>
-          </a:p>
-          <a:p>
-            <a:pPr indent="0" marL="0">
-              <a:lnSpc>
-                <a:spcPct val="125000"/>
-              </a:lnSpc>
-              <a:buNone/>
-            </a:pPr>
-            <a:endParaRPr lang="en-US" sz="1500" dirty="0"/>
-          </a:p>
-          <a:p>
-            <a:pPr indent="0" marL="0">
-              <a:lnSpc>
-                <a:spcPct val="125000"/>
-              </a:lnSpc>
-              <a:buNone/>
-            </a:pPr>
-            <a:r>
-              <a:rPr lang="en-US" sz="1500" dirty="0">
-                <a:solidFill>
-                  <a:srgbClr val="1A2B28"/>
-                </a:solidFill>
-                <a:latin typeface="Calibri" pitchFamily="34" charset="0"/>
-                <a:ea typeface="Calibri" pitchFamily="34" charset="-122"/>
-                <a:cs typeface="Calibri" pitchFamily="34" charset="-120"/>
-              </a:rPr>
-              <a:t>A modelagem trabalha com a população testada.</a:t>
-            </a:r>
-            <a:endParaRPr lang="en-US" sz="1500" dirty="0"/>
+              <a:t>Incluir os ausentes prevê quem será contabilizado. Restringir aos testados prevê quem de fato não atinge o corte. A modelagem usa a população testada.</a:t>
+            </a:r>
+            <a:endParaRPr lang="en-US" sz="1600" dirty="0"/>
           </a:p>
         </p:txBody>
       </p:sp>
@@ -5426,17 +5281,17 @@
           <a:ln/>
         </p:spPr>
         <p:txBody>
-          <a:bodyPr wrap="square" lIns="0" tIns="0" rIns="0" bIns="0" rtlCol="0" anchor="ctr"/>
+          <a:bodyPr wrap="square" lIns="0" tIns="0" rIns="0" bIns="0" rtlCol="0" anchor="t"/>
           <a:lstStyle/>
           <a:p>
             <a:pPr indent="0" marL="0">
               <a:lnSpc>
-                <a:spcPct val="125000"/>
+                <a:spcPct val="130000"/>
               </a:lnSpc>
               <a:buNone/>
             </a:pPr>
             <a:r>
-              <a:rPr lang="en-US" sz="1500" dirty="0">
+              <a:rPr lang="en-US" sz="1600" dirty="0">
                 <a:solidFill>
                   <a:srgbClr val="1A2B28"/>
                 </a:solidFill>
@@ -5444,28 +5299,28 @@
                 <a:ea typeface="Calibri" pitchFamily="34" charset="-122"/>
                 <a:cs typeface="Calibri" pitchFamily="34" charset="-120"/>
               </a:rPr>
-              <a:t>Separar aprendizagem de participação reordena as regiões. O Sul tem o melhor desempenho entre quem faz a prova e cai para terceiro no indicador oficial, porque tem a maior ausência do país. O Nordeste apresenta o quadro inverso.</a:t>
-            </a:r>
-            <a:endParaRPr lang="en-US" sz="1500" dirty="0"/>
+              <a:t>Separar aprendizagem de participação reordena as regiões. O Sul lidera entre quem faz a prova e cai para terceiro no indicador oficial, por ter a maior ausência do país.</a:t>
+            </a:r>
+            <a:endParaRPr lang="en-US" sz="1600" dirty="0"/>
           </a:p>
           <a:p>
             <a:pPr indent="0" marL="0">
               <a:lnSpc>
-                <a:spcPct val="125000"/>
+                <a:spcPct val="130000"/>
               </a:lnSpc>
               <a:buNone/>
             </a:pPr>
-            <a:endParaRPr lang="en-US" sz="1500" dirty="0"/>
+            <a:endParaRPr lang="en-US" sz="1600" dirty="0"/>
           </a:p>
           <a:p>
             <a:pPr indent="0" marL="0">
               <a:lnSpc>
-                <a:spcPct val="125000"/>
+                <a:spcPct val="130000"/>
               </a:lnSpc>
               <a:buNone/>
             </a:pPr>
             <a:r>
-              <a:rPr lang="en-US" sz="1500" dirty="0">
+              <a:rPr lang="en-US" sz="1600" dirty="0">
                 <a:solidFill>
                   <a:srgbClr val="1A2B28"/>
                 </a:solidFill>
@@ -5473,9 +5328,9 @@
                 <a:ea typeface="Calibri" pitchFamily="34" charset="-122"/>
                 <a:cs typeface="Calibri" pitchFamily="34" charset="-120"/>
               </a:rPr>
-              <a:t>Levar a criança à avaliação e garantir que ela aprenda são problemas distintos, com políticas distintas. Um indicador único não diz qual dos dois está falhando.</a:t>
-            </a:r>
-            <a:endParaRPr lang="en-US" sz="1500" dirty="0"/>
+              <a:t>São dois problemas, com políticas distintas.</a:t>
+            </a:r>
+            <a:endParaRPr lang="en-US" sz="1600" dirty="0"/>
           </a:p>
         </p:txBody>
       </p:sp>
@@ -6861,17 +6716,17 @@
           <a:ln/>
         </p:spPr>
         <p:txBody>
-          <a:bodyPr wrap="square" lIns="0" tIns="0" rIns="0" bIns="0" rtlCol="0" anchor="ctr"/>
+          <a:bodyPr wrap="square" lIns="0" tIns="0" rIns="0" bIns="0" rtlCol="0" anchor="t"/>
           <a:lstStyle/>
           <a:p>
             <a:pPr indent="0" marL="0">
               <a:lnSpc>
-                <a:spcPct val="125000"/>
+                <a:spcPct val="130000"/>
               </a:lnSpc>
               <a:buNone/>
             </a:pPr>
             <a:r>
-              <a:rPr lang="en-US" sz="1500" dirty="0">
+              <a:rPr lang="en-US" sz="1600" dirty="0">
                 <a:solidFill>
                   <a:srgbClr val="1A2B28"/>
                 </a:solidFill>
@@ -6879,28 +6734,28 @@
                 <a:ea typeface="Calibri" pitchFamily="34" charset="-122"/>
                 <a:cs typeface="Calibri" pitchFamily="34" charset="-120"/>
               </a:rPr>
-              <a:t>Gradient boosting sobre pipeline com imputação, codificação e escala integradas ao estimador. A separação e a validação cruzada são agrupadas por município, para que o modelo seja testado em territórios que nunca viu.</a:t>
-            </a:r>
-            <a:endParaRPr lang="en-US" sz="1500" dirty="0"/>
+              <a:t>Gradient boosting sobre pipeline com pré-processamento integrado. Validação agrupada por município: o modelo é testado em territórios que nunca viu.</a:t>
+            </a:r>
+            <a:endParaRPr lang="en-US" sz="1600" dirty="0"/>
           </a:p>
           <a:p>
             <a:pPr indent="0" marL="0">
               <a:lnSpc>
-                <a:spcPct val="125000"/>
+                <a:spcPct val="130000"/>
               </a:lnSpc>
               <a:buNone/>
             </a:pPr>
-            <a:endParaRPr lang="en-US" sz="1500" dirty="0"/>
+            <a:endParaRPr lang="en-US" sz="1600" dirty="0"/>
           </a:p>
           <a:p>
             <a:pPr indent="0" marL="0">
               <a:lnSpc>
-                <a:spcPct val="125000"/>
+                <a:spcPct val="130000"/>
               </a:lnSpc>
               <a:buNone/>
             </a:pPr>
             <a:r>
-              <a:rPr lang="en-US" sz="1500" dirty="0">
+              <a:rPr lang="en-US" sz="1600" dirty="0">
                 <a:solidFill>
                   <a:srgbClr val="1A2B28"/>
                 </a:solidFill>
@@ -6908,9 +6763,9 @@
                 <a:ea typeface="Calibri" pitchFamily="34" charset="-122"/>
                 <a:cs typeface="Calibri" pitchFamily="34" charset="-120"/>
               </a:rPr>
-              <a:t>Os limiares de aceitação foram escritos no primeiro commit, antes de qualquer resultado. Na primeira execução um deles reprovou, e a investigação mostrou que ele era inatingível: nem um oráculo com a taxa real do município passaria.</a:t>
-            </a:r>
-            <a:endParaRPr lang="en-US" sz="1500" dirty="0"/>
+              <a:t>Os limiares foram escritos antes de treinar. Um reprovou e se mostrou inatingível.</a:t>
+            </a:r>
+            <a:endParaRPr lang="en-US" sz="1600" dirty="0"/>
           </a:p>
         </p:txBody>
       </p:sp>
@@ -7359,17 +7214,17 @@
           <a:ln/>
         </p:spPr>
         <p:txBody>
-          <a:bodyPr wrap="square" lIns="0" tIns="0" rIns="0" bIns="0" rtlCol="0" anchor="ctr"/>
+          <a:bodyPr wrap="square" lIns="0" tIns="0" rIns="0" bIns="0" rtlCol="0" anchor="t"/>
           <a:lstStyle/>
           <a:p>
             <a:pPr indent="0" marL="0">
               <a:lnSpc>
-                <a:spcPct val="125000"/>
+                <a:spcPct val="130000"/>
               </a:lnSpc>
               <a:buNone/>
             </a:pPr>
             <a:r>
-              <a:rPr lang="en-US" sz="1500" dirty="0">
+              <a:rPr lang="en-US" sz="1600" dirty="0">
                 <a:solidFill>
                   <a:srgbClr val="1A2B28"/>
                 </a:solidFill>
@@ -7377,28 +7232,28 @@
                 <a:ea typeface="Calibri" pitchFamily="34" charset="-122"/>
                 <a:cs typeface="Calibri" pitchFamily="34" charset="-120"/>
               </a:rPr>
-              <a:t>No grão do aluno o modelo é modesto. Agregando as predições por município e comparando com a taxa real, a correlação é de 0,83.</a:t>
-            </a:r>
-            <a:endParaRPr lang="en-US" sz="1500" dirty="0"/>
+              <a:t>No aluno o modelo é modesto. Agregado por município, a correlação com a taxa real é 0,83.</a:t>
+            </a:r>
+            <a:endParaRPr lang="en-US" sz="1600" dirty="0"/>
           </a:p>
           <a:p>
             <a:pPr indent="0" marL="0">
               <a:lnSpc>
-                <a:spcPct val="125000"/>
+                <a:spcPct val="130000"/>
               </a:lnSpc>
               <a:buNone/>
             </a:pPr>
-            <a:endParaRPr lang="en-US" sz="1500" dirty="0"/>
+            <a:endParaRPr lang="en-US" sz="1600" dirty="0"/>
           </a:p>
           <a:p>
             <a:pPr indent="0" marL="0">
               <a:lnSpc>
-                <a:spcPct val="125000"/>
+                <a:spcPct val="130000"/>
               </a:lnSpc>
               <a:buNone/>
             </a:pPr>
             <a:r>
-              <a:rPr lang="en-US" sz="1500" dirty="0">
+              <a:rPr lang="en-US" sz="1600" dirty="0">
                 <a:solidFill>
                   <a:srgbClr val="1A2B28"/>
                 </a:solidFill>
@@ -7406,28 +7261,28 @@
                 <a:ea typeface="Calibri" pitchFamily="34" charset="-122"/>
                 <a:cs typeface="Calibri" pitchFamily="34" charset="-120"/>
               </a:rPr>
-              <a:t>Não há contradição: os erros individuais são grandes, mas não sistemáticos, e se cancelam na média. O modelo não sabe qual criança não será alfabetizada, mas sabe bem quantas não serão.</a:t>
-            </a:r>
-            <a:endParaRPr lang="en-US" sz="1500" dirty="0"/>
+              <a:t>Os erros individuais se cancelam na média. O modelo não sabe qual criança não será alfabetizada; sabe quantas não serão.</a:t>
+            </a:r>
+            <a:endParaRPr lang="en-US" sz="1600" dirty="0"/>
           </a:p>
           <a:p>
             <a:pPr indent="0" marL="0">
               <a:lnSpc>
-                <a:spcPct val="125000"/>
+                <a:spcPct val="130000"/>
               </a:lnSpc>
               <a:buNone/>
             </a:pPr>
-            <a:endParaRPr lang="en-US" sz="1500" dirty="0"/>
+            <a:endParaRPr lang="en-US" sz="1600" dirty="0"/>
           </a:p>
           <a:p>
             <a:pPr indent="0" marL="0">
               <a:lnSpc>
-                <a:spcPct val="125000"/>
+                <a:spcPct val="130000"/>
               </a:lnSpc>
               <a:buNone/>
             </a:pPr>
             <a:r>
-              <a:rPr lang="en-US" sz="1500" dirty="0">
+              <a:rPr lang="en-US" sz="1600" dirty="0">
                 <a:solidFill>
                   <a:srgbClr val="1A2B28"/>
                 </a:solidFill>
@@ -7435,9 +7290,9 @@
                 <a:ea typeface="Calibri" pitchFamily="34" charset="-122"/>
                 <a:cs typeface="Calibri" pitchFamily="34" charset="-120"/>
               </a:rPr>
-              <a:t>Isso define o uso correto — ordenar territórios, não decidir sobre uma criança.</a:t>
-            </a:r>
-            <a:endParaRPr lang="en-US" sz="1500" dirty="0"/>
+              <a:t>O uso certo é ordenar territórios.</a:t>
+            </a:r>
+            <a:endParaRPr lang="en-US" sz="1600" dirty="0"/>
           </a:p>
         </p:txBody>
       </p:sp>
@@ -7886,17 +7741,17 @@
           <a:ln/>
         </p:spPr>
         <p:txBody>
-          <a:bodyPr wrap="square" lIns="0" tIns="0" rIns="0" bIns="0" rtlCol="0" anchor="ctr"/>
+          <a:bodyPr wrap="square" lIns="0" tIns="0" rIns="0" bIns="0" rtlCol="0" anchor="t"/>
           <a:lstStyle/>
           <a:p>
             <a:pPr indent="0" marL="0">
               <a:lnSpc>
-                <a:spcPct val="125000"/>
+                <a:spcPct val="130000"/>
               </a:lnSpc>
               <a:buNone/>
             </a:pPr>
             <a:r>
-              <a:rPr lang="en-US" sz="1500" dirty="0">
+              <a:rPr lang="en-US" sz="1600" dirty="0">
                 <a:solidFill>
                   <a:srgbClr val="1A2B28"/>
                 </a:solidFill>
@@ -7904,28 +7759,28 @@
                 <a:ea typeface="Calibri" pitchFamily="34" charset="-122"/>
                 <a:cs typeface="Calibri" pitchFamily="34" charset="-120"/>
               </a:rPr>
-              <a:t>A história do próprio município domina, com peso duas vezes maior que a segunda variável. As cinco mais influentes são todas territoriais, e o que descreve o aluno quase não pesa.</a:t>
-            </a:r>
-            <a:endParaRPr lang="en-US" sz="1500" dirty="0"/>
+              <a:t>A história do próprio município domina, com peso duas vezes maior que a segunda variável. As cinco mais influentes são territoriais.</a:t>
+            </a:r>
+            <a:endParaRPr lang="en-US" sz="1600" dirty="0"/>
           </a:p>
           <a:p>
             <a:pPr indent="0" marL="0">
               <a:lnSpc>
-                <a:spcPct val="125000"/>
+                <a:spcPct val="130000"/>
               </a:lnSpc>
               <a:buNone/>
             </a:pPr>
-            <a:endParaRPr lang="en-US" sz="1500" dirty="0"/>
+            <a:endParaRPr lang="en-US" sz="1600" dirty="0"/>
           </a:p>
           <a:p>
             <a:pPr indent="0" marL="0">
               <a:lnSpc>
-                <a:spcPct val="125000"/>
+                <a:spcPct val="130000"/>
               </a:lnSpc>
               <a:buNone/>
             </a:pPr>
             <a:r>
-              <a:rPr lang="en-US" sz="1500" dirty="0">
+              <a:rPr lang="en-US" sz="1600" dirty="0">
                 <a:solidFill>
                   <a:srgbClr val="1A2B28"/>
                 </a:solidFill>
@@ -7933,9 +7788,9 @@
                 <a:ea typeface="Calibri" pitchFamily="34" charset="-122"/>
                 <a:cs typeface="Calibri" pitchFamily="34" charset="-120"/>
               </a:rPr>
-              <a:t>Uma ressalva importa: o modelo mede associação dentro do que enxerga. Ele não tem variáveis de professor, turma ou família, então o território acaba representando tudo o que está correlacionado com ele. Subir o IDEB não causa alfabetização; ambos vêm da mesma qualidade de ensino.</a:t>
-            </a:r>
-            <a:endParaRPr lang="en-US" sz="1500" dirty="0"/>
+              <a:t>O modelo mede associação. Sem variáveis de professor, turma ou família, o território representa tudo isso junto.</a:t>
+            </a:r>
+            <a:endParaRPr lang="en-US" sz="1600" dirty="0"/>
           </a:p>
         </p:txBody>
       </p:sp>
